--- a/宣道詩/(宣道詩153) 我屬乎主.pptx
+++ b/宣道詩/(宣道詩153) 我屬乎主.pptx
@@ -326,6 +326,11 @@
         </p:txBody>
       </p:sp>
     </p:spTree>
+    <p:extLst>
+      <p:ext uri="{BB962C8B-B14F-4D97-AF65-F5344CB8AC3E}">
+        <p14:creationId xmlns:p14="http://schemas.microsoft.com/office/powerpoint/2010/main" val="1"/>
+      </p:ext>
+    </p:extLst>
   </p:cSld>
   <p:clrMap bg1="lt1" tx1="dk1" bg2="lt2" tx2="dk2" accent1="accent1" accent2="accent2" accent3="accent3" accent4="accent4" accent5="accent5" accent6="accent6" hlink="hlink" folHlink="folHlink"/>
 </p:handoutMaster>
@@ -475,38 +480,37 @@
           <a:p>
             <a:pPr lvl="0"/>
             <a:r>
-              <a:rPr lang="zh-TW" altLang="en-US" smtClean="0"/>
+              <a:rPr lang="zh-TW" altLang="en-US"/>
               <a:t>按一下以編輯母片文字樣式</a:t>
             </a:r>
           </a:p>
           <a:p>
             <a:pPr lvl="1"/>
             <a:r>
-              <a:rPr lang="zh-TW" altLang="en-US" smtClean="0"/>
+              <a:rPr lang="zh-TW" altLang="en-US"/>
               <a:t>第二層</a:t>
             </a:r>
           </a:p>
           <a:p>
             <a:pPr lvl="2"/>
             <a:r>
-              <a:rPr lang="zh-TW" altLang="en-US" smtClean="0"/>
+              <a:rPr lang="zh-TW" altLang="en-US"/>
               <a:t>第三層</a:t>
             </a:r>
           </a:p>
           <a:p>
             <a:pPr lvl="3"/>
             <a:r>
-              <a:rPr lang="zh-TW" altLang="en-US" smtClean="0"/>
+              <a:rPr lang="zh-TW" altLang="en-US"/>
               <a:t>第四層</a:t>
             </a:r>
           </a:p>
           <a:p>
             <a:pPr lvl="4"/>
             <a:r>
-              <a:rPr lang="zh-TW" altLang="en-US" smtClean="0"/>
+              <a:rPr lang="zh-TW" altLang="en-US"/>
               <a:t>第五層</a:t>
             </a:r>
-            <a:endParaRPr lang="zh-TW" altLang="en-US"/>
           </a:p>
         </p:txBody>
       </p:sp>
@@ -712,7 +716,7 @@
           <a:lstStyle/>
           <a:p>
             <a:r>
-              <a:rPr lang="en-US" altLang="zh-TW" smtClean="0"/>
+              <a:rPr lang="en-US" altLang="zh-TW"/>
               <a:t>Click to edit Master title style</a:t>
             </a:r>
             <a:endParaRPr lang="zh-TW" altLang="en-US"/>
@@ -831,7 +835,7 @@
           </a:lstStyle>
           <a:p>
             <a:r>
-              <a:rPr lang="en-US" altLang="zh-TW" smtClean="0"/>
+              <a:rPr lang="en-US" altLang="zh-TW"/>
               <a:t>Click to edit Master subtitle style</a:t>
             </a:r>
             <a:endParaRPr lang="zh-TW" altLang="en-US"/>
@@ -954,7 +958,7 @@
           <a:lstStyle/>
           <a:p>
             <a:r>
-              <a:rPr lang="en-US" altLang="zh-TW" smtClean="0"/>
+              <a:rPr lang="en-US" altLang="zh-TW"/>
               <a:t>Click to edit Master title style</a:t>
             </a:r>
             <a:endParaRPr lang="zh-TW" altLang="en-US"/>
@@ -978,35 +982,35 @@
           <a:p>
             <a:pPr lvl="0"/>
             <a:r>
-              <a:rPr lang="en-US" altLang="zh-TW" smtClean="0"/>
+              <a:rPr lang="en-US" altLang="zh-TW"/>
               <a:t>Edit Master text styles</a:t>
             </a:r>
           </a:p>
           <a:p>
             <a:pPr lvl="1"/>
             <a:r>
-              <a:rPr lang="en-US" altLang="zh-TW" smtClean="0"/>
+              <a:rPr lang="en-US" altLang="zh-TW"/>
               <a:t>Second level</a:t>
             </a:r>
           </a:p>
           <a:p>
             <a:pPr lvl="2"/>
             <a:r>
-              <a:rPr lang="en-US" altLang="zh-TW" smtClean="0"/>
+              <a:rPr lang="en-US" altLang="zh-TW"/>
               <a:t>Third level</a:t>
             </a:r>
           </a:p>
           <a:p>
             <a:pPr lvl="3"/>
             <a:r>
-              <a:rPr lang="en-US" altLang="zh-TW" smtClean="0"/>
+              <a:rPr lang="en-US" altLang="zh-TW"/>
               <a:t>Fourth level</a:t>
             </a:r>
           </a:p>
           <a:p>
             <a:pPr lvl="4"/>
             <a:r>
-              <a:rPr lang="en-US" altLang="zh-TW" smtClean="0"/>
+              <a:rPr lang="en-US" altLang="zh-TW"/>
               <a:t>Fifth level</a:t>
             </a:r>
             <a:endParaRPr lang="zh-TW" altLang="en-US"/>
@@ -1134,7 +1138,7 @@
           <a:lstStyle/>
           <a:p>
             <a:r>
-              <a:rPr lang="en-US" altLang="zh-TW" smtClean="0"/>
+              <a:rPr lang="en-US" altLang="zh-TW"/>
               <a:t>Click to edit Master title style</a:t>
             </a:r>
             <a:endParaRPr lang="zh-TW" altLang="en-US"/>
@@ -1163,35 +1167,35 @@
           <a:p>
             <a:pPr lvl="0"/>
             <a:r>
-              <a:rPr lang="en-US" altLang="zh-TW" smtClean="0"/>
+              <a:rPr lang="en-US" altLang="zh-TW"/>
               <a:t>Edit Master text styles</a:t>
             </a:r>
           </a:p>
           <a:p>
             <a:pPr lvl="1"/>
             <a:r>
-              <a:rPr lang="en-US" altLang="zh-TW" smtClean="0"/>
+              <a:rPr lang="en-US" altLang="zh-TW"/>
               <a:t>Second level</a:t>
             </a:r>
           </a:p>
           <a:p>
             <a:pPr lvl="2"/>
             <a:r>
-              <a:rPr lang="en-US" altLang="zh-TW" smtClean="0"/>
+              <a:rPr lang="en-US" altLang="zh-TW"/>
               <a:t>Third level</a:t>
             </a:r>
           </a:p>
           <a:p>
             <a:pPr lvl="3"/>
             <a:r>
-              <a:rPr lang="en-US" altLang="zh-TW" smtClean="0"/>
+              <a:rPr lang="en-US" altLang="zh-TW"/>
               <a:t>Fourth level</a:t>
             </a:r>
           </a:p>
           <a:p>
             <a:pPr lvl="4"/>
             <a:r>
-              <a:rPr lang="en-US" altLang="zh-TW" smtClean="0"/>
+              <a:rPr lang="en-US" altLang="zh-TW"/>
               <a:t>Fifth level</a:t>
             </a:r>
             <a:endParaRPr lang="zh-TW" altLang="en-US"/>
@@ -1314,7 +1318,7 @@
           <a:lstStyle/>
           <a:p>
             <a:r>
-              <a:rPr lang="en-US" altLang="zh-TW" smtClean="0"/>
+              <a:rPr lang="en-US" altLang="zh-TW"/>
               <a:t>Click to edit Master title style</a:t>
             </a:r>
             <a:endParaRPr lang="zh-TW" altLang="en-US"/>
@@ -1338,35 +1342,35 @@
           <a:p>
             <a:pPr lvl="0"/>
             <a:r>
-              <a:rPr lang="en-US" altLang="zh-TW" smtClean="0"/>
+              <a:rPr lang="en-US" altLang="zh-TW"/>
               <a:t>Edit Master text styles</a:t>
             </a:r>
           </a:p>
           <a:p>
             <a:pPr lvl="1"/>
             <a:r>
-              <a:rPr lang="en-US" altLang="zh-TW" smtClean="0"/>
+              <a:rPr lang="en-US" altLang="zh-TW"/>
               <a:t>Second level</a:t>
             </a:r>
           </a:p>
           <a:p>
             <a:pPr lvl="2"/>
             <a:r>
-              <a:rPr lang="en-US" altLang="zh-TW" smtClean="0"/>
+              <a:rPr lang="en-US" altLang="zh-TW"/>
               <a:t>Third level</a:t>
             </a:r>
           </a:p>
           <a:p>
             <a:pPr lvl="3"/>
             <a:r>
-              <a:rPr lang="en-US" altLang="zh-TW" smtClean="0"/>
+              <a:rPr lang="en-US" altLang="zh-TW"/>
               <a:t>Fourth level</a:t>
             </a:r>
           </a:p>
           <a:p>
             <a:pPr lvl="4"/>
             <a:r>
-              <a:rPr lang="en-US" altLang="zh-TW" smtClean="0"/>
+              <a:rPr lang="en-US" altLang="zh-TW"/>
               <a:t>Fifth level</a:t>
             </a:r>
             <a:endParaRPr lang="zh-TW" altLang="en-US"/>
@@ -1498,7 +1502,7 @@
           </a:lstStyle>
           <a:p>
             <a:r>
-              <a:rPr lang="en-US" altLang="zh-TW" smtClean="0"/>
+              <a:rPr lang="en-US" altLang="zh-TW"/>
               <a:t>Click to edit Master title style</a:t>
             </a:r>
             <a:endParaRPr lang="zh-TW" altLang="en-US"/>
@@ -1618,7 +1622,7 @@
           <a:p>
             <a:pPr lvl="0"/>
             <a:r>
-              <a:rPr lang="en-US" altLang="zh-TW" smtClean="0"/>
+              <a:rPr lang="en-US" altLang="zh-TW"/>
               <a:t>Edit Master text styles</a:t>
             </a:r>
           </a:p>
@@ -1740,7 +1744,7 @@
           <a:lstStyle/>
           <a:p>
             <a:r>
-              <a:rPr lang="en-US" altLang="zh-TW" smtClean="0"/>
+              <a:rPr lang="en-US" altLang="zh-TW"/>
               <a:t>Click to edit Master title style</a:t>
             </a:r>
             <a:endParaRPr lang="zh-TW" altLang="en-US"/>
@@ -1797,35 +1801,35 @@
           <a:p>
             <a:pPr lvl="0"/>
             <a:r>
-              <a:rPr lang="en-US" altLang="zh-TW" smtClean="0"/>
+              <a:rPr lang="en-US" altLang="zh-TW"/>
               <a:t>Edit Master text styles</a:t>
             </a:r>
           </a:p>
           <a:p>
             <a:pPr lvl="1"/>
             <a:r>
-              <a:rPr lang="en-US" altLang="zh-TW" smtClean="0"/>
+              <a:rPr lang="en-US" altLang="zh-TW"/>
               <a:t>Second level</a:t>
             </a:r>
           </a:p>
           <a:p>
             <a:pPr lvl="2"/>
             <a:r>
-              <a:rPr lang="en-US" altLang="zh-TW" smtClean="0"/>
+              <a:rPr lang="en-US" altLang="zh-TW"/>
               <a:t>Third level</a:t>
             </a:r>
           </a:p>
           <a:p>
             <a:pPr lvl="3"/>
             <a:r>
-              <a:rPr lang="en-US" altLang="zh-TW" smtClean="0"/>
+              <a:rPr lang="en-US" altLang="zh-TW"/>
               <a:t>Fourth level</a:t>
             </a:r>
           </a:p>
           <a:p>
             <a:pPr lvl="4"/>
             <a:r>
-              <a:rPr lang="en-US" altLang="zh-TW" smtClean="0"/>
+              <a:rPr lang="en-US" altLang="zh-TW"/>
               <a:t>Fifth level</a:t>
             </a:r>
             <a:endParaRPr lang="zh-TW" altLang="en-US"/>
@@ -1882,35 +1886,35 @@
           <a:p>
             <a:pPr lvl="0"/>
             <a:r>
-              <a:rPr lang="en-US" altLang="zh-TW" smtClean="0"/>
+              <a:rPr lang="en-US" altLang="zh-TW"/>
               <a:t>Edit Master text styles</a:t>
             </a:r>
           </a:p>
           <a:p>
             <a:pPr lvl="1"/>
             <a:r>
-              <a:rPr lang="en-US" altLang="zh-TW" smtClean="0"/>
+              <a:rPr lang="en-US" altLang="zh-TW"/>
               <a:t>Second level</a:t>
             </a:r>
           </a:p>
           <a:p>
             <a:pPr lvl="2"/>
             <a:r>
-              <a:rPr lang="en-US" altLang="zh-TW" smtClean="0"/>
+              <a:rPr lang="en-US" altLang="zh-TW"/>
               <a:t>Third level</a:t>
             </a:r>
           </a:p>
           <a:p>
             <a:pPr lvl="3"/>
             <a:r>
-              <a:rPr lang="en-US" altLang="zh-TW" smtClean="0"/>
+              <a:rPr lang="en-US" altLang="zh-TW"/>
               <a:t>Fourth level</a:t>
             </a:r>
           </a:p>
           <a:p>
             <a:pPr lvl="4"/>
             <a:r>
-              <a:rPr lang="en-US" altLang="zh-TW" smtClean="0"/>
+              <a:rPr lang="en-US" altLang="zh-TW"/>
               <a:t>Fifth level</a:t>
             </a:r>
             <a:endParaRPr lang="zh-TW" altLang="en-US"/>
@@ -2037,7 +2041,7 @@
           </a:lstStyle>
           <a:p>
             <a:r>
-              <a:rPr lang="en-US" altLang="zh-TW" smtClean="0"/>
+              <a:rPr lang="en-US" altLang="zh-TW"/>
               <a:t>Click to edit Master title style</a:t>
             </a:r>
             <a:endParaRPr lang="zh-TW" altLang="en-US"/>
@@ -2103,7 +2107,7 @@
           <a:p>
             <a:pPr lvl="0"/>
             <a:r>
-              <a:rPr lang="en-US" altLang="zh-TW" smtClean="0"/>
+              <a:rPr lang="en-US" altLang="zh-TW"/>
               <a:t>Edit Master text styles</a:t>
             </a:r>
           </a:p>
@@ -2159,35 +2163,35 @@
           <a:p>
             <a:pPr lvl="0"/>
             <a:r>
-              <a:rPr lang="en-US" altLang="zh-TW" smtClean="0"/>
+              <a:rPr lang="en-US" altLang="zh-TW"/>
               <a:t>Edit Master text styles</a:t>
             </a:r>
           </a:p>
           <a:p>
             <a:pPr lvl="1"/>
             <a:r>
-              <a:rPr lang="en-US" altLang="zh-TW" smtClean="0"/>
+              <a:rPr lang="en-US" altLang="zh-TW"/>
               <a:t>Second level</a:t>
             </a:r>
           </a:p>
           <a:p>
             <a:pPr lvl="2"/>
             <a:r>
-              <a:rPr lang="en-US" altLang="zh-TW" smtClean="0"/>
+              <a:rPr lang="en-US" altLang="zh-TW"/>
               <a:t>Third level</a:t>
             </a:r>
           </a:p>
           <a:p>
             <a:pPr lvl="3"/>
             <a:r>
-              <a:rPr lang="en-US" altLang="zh-TW" smtClean="0"/>
+              <a:rPr lang="en-US" altLang="zh-TW"/>
               <a:t>Fourth level</a:t>
             </a:r>
           </a:p>
           <a:p>
             <a:pPr lvl="4"/>
             <a:r>
-              <a:rPr lang="en-US" altLang="zh-TW" smtClean="0"/>
+              <a:rPr lang="en-US" altLang="zh-TW"/>
               <a:t>Fifth level</a:t>
             </a:r>
             <a:endParaRPr lang="zh-TW" altLang="en-US"/>
@@ -2253,7 +2257,7 @@
           <a:p>
             <a:pPr lvl="0"/>
             <a:r>
-              <a:rPr lang="en-US" altLang="zh-TW" smtClean="0"/>
+              <a:rPr lang="en-US" altLang="zh-TW"/>
               <a:t>Edit Master text styles</a:t>
             </a:r>
           </a:p>
@@ -2309,35 +2313,35 @@
           <a:p>
             <a:pPr lvl="0"/>
             <a:r>
-              <a:rPr lang="en-US" altLang="zh-TW" smtClean="0"/>
+              <a:rPr lang="en-US" altLang="zh-TW"/>
               <a:t>Edit Master text styles</a:t>
             </a:r>
           </a:p>
           <a:p>
             <a:pPr lvl="1"/>
             <a:r>
-              <a:rPr lang="en-US" altLang="zh-TW" smtClean="0"/>
+              <a:rPr lang="en-US" altLang="zh-TW"/>
               <a:t>Second level</a:t>
             </a:r>
           </a:p>
           <a:p>
             <a:pPr lvl="2"/>
             <a:r>
-              <a:rPr lang="en-US" altLang="zh-TW" smtClean="0"/>
+              <a:rPr lang="en-US" altLang="zh-TW"/>
               <a:t>Third level</a:t>
             </a:r>
           </a:p>
           <a:p>
             <a:pPr lvl="3"/>
             <a:r>
-              <a:rPr lang="en-US" altLang="zh-TW" smtClean="0"/>
+              <a:rPr lang="en-US" altLang="zh-TW"/>
               <a:t>Fourth level</a:t>
             </a:r>
           </a:p>
           <a:p>
             <a:pPr lvl="4"/>
             <a:r>
-              <a:rPr lang="en-US" altLang="zh-TW" smtClean="0"/>
+              <a:rPr lang="en-US" altLang="zh-TW"/>
               <a:t>Fifth level</a:t>
             </a:r>
             <a:endParaRPr lang="zh-TW" altLang="en-US"/>
@@ -2460,7 +2464,7 @@
           <a:lstStyle/>
           <a:p>
             <a:r>
-              <a:rPr lang="en-US" altLang="zh-TW" smtClean="0"/>
+              <a:rPr lang="en-US" altLang="zh-TW"/>
               <a:t>Click to edit Master title style</a:t>
             </a:r>
             <a:endParaRPr lang="zh-TW" altLang="en-US"/>
@@ -2692,7 +2696,7 @@
           </a:lstStyle>
           <a:p>
             <a:r>
-              <a:rPr lang="en-US" altLang="zh-TW" smtClean="0"/>
+              <a:rPr lang="en-US" altLang="zh-TW"/>
               <a:t>Click to edit Master title style</a:t>
             </a:r>
             <a:endParaRPr lang="zh-TW" altLang="en-US"/>
@@ -2749,35 +2753,35 @@
           <a:p>
             <a:pPr lvl="0"/>
             <a:r>
-              <a:rPr lang="en-US" altLang="zh-TW" smtClean="0"/>
+              <a:rPr lang="en-US" altLang="zh-TW"/>
               <a:t>Edit Master text styles</a:t>
             </a:r>
           </a:p>
           <a:p>
             <a:pPr lvl="1"/>
             <a:r>
-              <a:rPr lang="en-US" altLang="zh-TW" smtClean="0"/>
+              <a:rPr lang="en-US" altLang="zh-TW"/>
               <a:t>Second level</a:t>
             </a:r>
           </a:p>
           <a:p>
             <a:pPr lvl="2"/>
             <a:r>
-              <a:rPr lang="en-US" altLang="zh-TW" smtClean="0"/>
+              <a:rPr lang="en-US" altLang="zh-TW"/>
               <a:t>Third level</a:t>
             </a:r>
           </a:p>
           <a:p>
             <a:pPr lvl="3"/>
             <a:r>
-              <a:rPr lang="en-US" altLang="zh-TW" smtClean="0"/>
+              <a:rPr lang="en-US" altLang="zh-TW"/>
               <a:t>Fourth level</a:t>
             </a:r>
           </a:p>
           <a:p>
             <a:pPr lvl="4"/>
             <a:r>
-              <a:rPr lang="en-US" altLang="zh-TW" smtClean="0"/>
+              <a:rPr lang="en-US" altLang="zh-TW"/>
               <a:t>Fifth level</a:t>
             </a:r>
             <a:endParaRPr lang="zh-TW" altLang="en-US"/>
@@ -2843,7 +2847,7 @@
           <a:p>
             <a:pPr lvl="0"/>
             <a:r>
-              <a:rPr lang="en-US" altLang="zh-TW" smtClean="0"/>
+              <a:rPr lang="en-US" altLang="zh-TW"/>
               <a:t>Edit Master text styles</a:t>
             </a:r>
           </a:p>
@@ -2974,7 +2978,7 @@
           </a:lstStyle>
           <a:p>
             <a:r>
-              <a:rPr lang="en-US" altLang="zh-TW" smtClean="0"/>
+              <a:rPr lang="en-US" altLang="zh-TW"/>
               <a:t>Click to edit Master title style</a:t>
             </a:r>
             <a:endParaRPr lang="zh-TW" altLang="en-US"/>
@@ -3039,7 +3043,7 @@
           </a:lstStyle>
           <a:p>
             <a:r>
-              <a:rPr lang="en-US" altLang="zh-TW" smtClean="0"/>
+              <a:rPr lang="en-US" altLang="zh-TW"/>
               <a:t>Click icon to add picture</a:t>
             </a:r>
             <a:endParaRPr lang="zh-TW" altLang="en-US"/>
@@ -3105,7 +3109,7 @@
           <a:p>
             <a:pPr lvl="0"/>
             <a:r>
-              <a:rPr lang="en-US" altLang="zh-TW" smtClean="0"/>
+              <a:rPr lang="en-US" altLang="zh-TW"/>
               <a:t>Edit Master text styles</a:t>
             </a:r>
           </a:p>
@@ -3247,10 +3251,9 @@
           <a:lstStyle/>
           <a:p>
             <a:r>
-              <a:rPr lang="zh-TW" altLang="en-US" smtClean="0"/>
+              <a:rPr lang="zh-TW" altLang="en-US"/>
               <a:t>按一下以編輯母片標題樣式</a:t>
             </a:r>
-            <a:endParaRPr lang="zh-TW" altLang="en-US"/>
           </a:p>
         </p:txBody>
       </p:sp>
@@ -3281,38 +3284,37 @@
           <a:p>
             <a:pPr lvl="0"/>
             <a:r>
-              <a:rPr lang="zh-TW" altLang="en-US" smtClean="0"/>
+              <a:rPr lang="zh-TW" altLang="en-US"/>
               <a:t>按一下以編輯母片文字樣式</a:t>
             </a:r>
           </a:p>
           <a:p>
             <a:pPr lvl="1"/>
             <a:r>
-              <a:rPr lang="zh-TW" altLang="en-US" smtClean="0"/>
+              <a:rPr lang="zh-TW" altLang="en-US"/>
               <a:t>第二層</a:t>
             </a:r>
           </a:p>
           <a:p>
             <a:pPr lvl="2"/>
             <a:r>
-              <a:rPr lang="zh-TW" altLang="en-US" smtClean="0"/>
+              <a:rPr lang="zh-TW" altLang="en-US"/>
               <a:t>第三層</a:t>
             </a:r>
           </a:p>
           <a:p>
             <a:pPr lvl="3"/>
             <a:r>
-              <a:rPr lang="zh-TW" altLang="en-US" smtClean="0"/>
+              <a:rPr lang="zh-TW" altLang="en-US"/>
               <a:t>第四層</a:t>
             </a:r>
           </a:p>
           <a:p>
             <a:pPr lvl="4"/>
             <a:r>
-              <a:rPr lang="zh-TW" altLang="en-US" smtClean="0"/>
+              <a:rPr lang="zh-TW" altLang="en-US"/>
               <a:t>第五層</a:t>
             </a:r>
-            <a:endParaRPr lang="zh-TW" altLang="en-US"/>
           </a:p>
         </p:txBody>
       </p:sp>
@@ -3787,23 +3789,6 @@
               </a:rPr>
               <a:t>153</a:t>
             </a:r>
-            <a:r>
-              <a:rPr lang="en-US" altLang="zh-CN" sz="7200" b="1" i="1" dirty="0">
-                <a:solidFill>
-                  <a:srgbClr val="660033"/>
-                </a:solidFill>
-                <a:effectLst>
-                  <a:outerShdw blurRad="38100" dist="38100" dir="2700000" algn="tl">
-                    <a:srgbClr val="000000">
-                      <a:alpha val="43137"/>
-                    </a:srgbClr>
-                  </a:outerShdw>
-                </a:effectLst>
-                <a:latin typeface="微軟正黑體" pitchFamily="34" charset="-120"/>
-                <a:ea typeface="微軟正黑體" pitchFamily="34" charset="-120"/>
-              </a:rPr>
-              <a:t/>
-            </a:r>
             <a:br>
               <a:rPr lang="en-US" altLang="zh-CN" sz="7200" b="1" i="1" dirty="0">
                 <a:solidFill>
@@ -3864,13 +3849,6 @@
   <p:clrMapOvr>
     <a:masterClrMapping/>
   </p:clrMapOvr>
-  <p:timing>
-    <p:tnLst>
-      <p:par>
-        <p:cTn id="1" dur="indefinite" restart="never" nodeType="tmRoot"/>
-      </p:par>
-    </p:tnLst>
-  </p:timing>
 </p:sld>
 </file>
 
@@ -3980,23 +3958,7 @@
                   <a:srgbClr val="660033"/>
                 </a:solidFill>
               </a:rPr>
-              <a:t>( </a:t>
-            </a:r>
-            <a:r>
-              <a:rPr lang="en-US" sz="4400" b="1" dirty="0" smtClean="0">
-                <a:solidFill>
-                  <a:srgbClr val="660033"/>
-                </a:solidFill>
-              </a:rPr>
-              <a:t>3 </a:t>
-            </a:r>
-            <a:r>
-              <a:rPr lang="en-US" sz="4400" b="1" dirty="0">
-                <a:solidFill>
-                  <a:srgbClr val="660033"/>
-                </a:solidFill>
-              </a:rPr>
-              <a:t>/ 4 )</a:t>
+              <a:t>( 3 / 4 )</a:t>
             </a:r>
             <a:endParaRPr lang="vi-VN" sz="4400" b="1" dirty="0">
               <a:solidFill>
@@ -4016,13 +3978,6 @@
   <p:clrMapOvr>
     <a:masterClrMapping/>
   </p:clrMapOvr>
-  <p:timing>
-    <p:tnLst>
-      <p:par>
-        <p:cTn id="1" dur="indefinite" restart="never" nodeType="tmRoot"/>
-      </p:par>
-    </p:tnLst>
-  </p:timing>
 </p:sld>
 </file>
 
@@ -4091,44 +4046,8 @@
                 <a:latin typeface="Microsoft JhengHei" panose="020B0604030504040204" pitchFamily="34" charset="-120"/>
                 <a:ea typeface="Microsoft JhengHei" panose="020B0604030504040204" pitchFamily="34" charset="-120"/>
               </a:rPr>
-              <a:t>勝華美    味嘉肴</a:t>
-            </a:r>
-          </a:p>
-        </p:txBody>
-      </p:sp>
-      <p:sp>
-        <p:nvSpPr>
-          <p:cNvPr id="2" name="TextBox 1"/>
-          <p:cNvSpPr txBox="1"/>
-          <p:nvPr/>
-        </p:nvSpPr>
-        <p:spPr>
-          <a:xfrm>
-            <a:off x="5519936" y="3322851"/>
-            <a:ext cx="1152128" cy="1077218"/>
-          </a:xfrm>
-          <a:prstGeom prst="rect">
-            <a:avLst/>
-          </a:prstGeom>
-          <a:noFill/>
-        </p:spPr>
-        <p:txBody>
-          <a:bodyPr wrap="square" rtlCol="0">
-            <a:spAutoFit/>
-          </a:bodyPr>
-          <a:lstStyle/>
-          <a:p>
-            <a:r>
-              <a:rPr lang="zh-TW" altLang="en-US" sz="6400" b="1" dirty="0">
-                <a:solidFill>
-                  <a:srgbClr val="660033"/>
-                </a:solidFill>
-                <a:latin typeface="Microsoft JhengHei" panose="020B0604030504040204" pitchFamily="34" charset="-120"/>
-                <a:ea typeface="Microsoft JhengHei" panose="020B0604030504040204" pitchFamily="34" charset="-120"/>
-              </a:rPr>
-              <a:t>筵</a:t>
-            </a:r>
-            <a:endParaRPr lang="vi-VN" sz="6400" dirty="0"/>
+              <a:t>勝華美筵味嘉肴</a:t>
+            </a:r>
           </a:p>
         </p:txBody>
       </p:sp>
@@ -4161,23 +4080,7 @@
                   <a:srgbClr val="660033"/>
                 </a:solidFill>
               </a:rPr>
-              <a:t>( </a:t>
-            </a:r>
-            <a:r>
-              <a:rPr lang="en-US" sz="4400" b="1" dirty="0" smtClean="0">
-                <a:solidFill>
-                  <a:srgbClr val="660033"/>
-                </a:solidFill>
-              </a:rPr>
-              <a:t>3 </a:t>
-            </a:r>
-            <a:r>
-              <a:rPr lang="en-US" sz="4400" b="1" dirty="0">
-                <a:solidFill>
-                  <a:srgbClr val="660033"/>
-                </a:solidFill>
-              </a:rPr>
-              <a:t>/ 4 )</a:t>
+              <a:t>( 3 / 4 )</a:t>
             </a:r>
             <a:endParaRPr lang="vi-VN" sz="4400" b="1" dirty="0">
               <a:solidFill>
@@ -4197,13 +4100,6 @@
   <p:clrMapOvr>
     <a:masterClrMapping/>
   </p:clrMapOvr>
-  <p:timing>
-    <p:tnLst>
-      <p:par>
-        <p:cTn id="1" dur="indefinite" restart="never" nodeType="tmRoot"/>
-      </p:par>
-    </p:tnLst>
-  </p:timing>
 </p:sld>
 </file>
 
@@ -4294,13 +4190,6 @@
   <p:clrMapOvr>
     <a:masterClrMapping/>
   </p:clrMapOvr>
-  <p:timing>
-    <p:tnLst>
-      <p:par>
-        <p:cTn id="1" dur="indefinite" restart="never" nodeType="tmRoot"/>
-      </p:par>
-    </p:tnLst>
-  </p:timing>
 </p:sld>
 </file>
 
@@ -4384,13 +4273,6 @@
   <p:clrMapOvr>
     <a:masterClrMapping/>
   </p:clrMapOvr>
-  <p:timing>
-    <p:tnLst>
-      <p:par>
-        <p:cTn id="1" dur="indefinite" restart="never" nodeType="tmRoot"/>
-      </p:par>
-    </p:tnLst>
-  </p:timing>
 </p:sld>
 </file>
 
@@ -4500,23 +4382,7 @@
                   <a:srgbClr val="660033"/>
                 </a:solidFill>
               </a:rPr>
-              <a:t>( </a:t>
-            </a:r>
-            <a:r>
-              <a:rPr lang="en-US" sz="4400" b="1" dirty="0" smtClean="0">
-                <a:solidFill>
-                  <a:srgbClr val="660033"/>
-                </a:solidFill>
-              </a:rPr>
-              <a:t>4 </a:t>
-            </a:r>
-            <a:r>
-              <a:rPr lang="en-US" sz="4400" b="1" dirty="0">
-                <a:solidFill>
-                  <a:srgbClr val="660033"/>
-                </a:solidFill>
-              </a:rPr>
-              <a:t>/ 4 )</a:t>
+              <a:t>( 4 / 4 )</a:t>
             </a:r>
             <a:endParaRPr lang="vi-VN" sz="4400" b="1" dirty="0">
               <a:solidFill>
@@ -4536,13 +4402,6 @@
   <p:clrMapOvr>
     <a:masterClrMapping/>
   </p:clrMapOvr>
-  <p:timing>
-    <p:tnLst>
-      <p:par>
-        <p:cTn id="1" dur="indefinite" restart="never" nodeType="tmRoot"/>
-      </p:par>
-    </p:tnLst>
-  </p:timing>
 </p:sld>
 </file>
 
@@ -4665,13 +4524,6 @@
   <p:clrMapOvr>
     <a:masterClrMapping/>
   </p:clrMapOvr>
-  <p:timing>
-    <p:tnLst>
-      <p:par>
-        <p:cTn id="1" dur="indefinite" restart="never" nodeType="tmRoot"/>
-      </p:par>
-    </p:tnLst>
-  </p:timing>
 </p:sld>
 </file>
 
@@ -4762,13 +4614,6 @@
   <p:clrMapOvr>
     <a:masterClrMapping/>
   </p:clrMapOvr>
-  <p:timing>
-    <p:tnLst>
-      <p:par>
-        <p:cTn id="1" dur="indefinite" restart="never" nodeType="tmRoot"/>
-      </p:par>
-    </p:tnLst>
-  </p:timing>
 </p:sld>
 </file>
 
@@ -4852,13 +4697,6 @@
   <p:clrMapOvr>
     <a:masterClrMapping/>
   </p:clrMapOvr>
-  <p:timing>
-    <p:tnLst>
-      <p:par>
-        <p:cTn id="1" dur="indefinite" restart="never" nodeType="tmRoot"/>
-      </p:par>
-    </p:tnLst>
-  </p:timing>
 </p:sld>
 </file>
 
@@ -4970,27 +4808,7 @@
                 <a:effectLst/>
                 <a:latin typeface="+mn-lt"/>
               </a:rPr>
-              <a:t>( </a:t>
-            </a:r>
-            <a:r>
-              <a:rPr lang="en-US" sz="4400" b="1" dirty="0" smtClean="0">
-                <a:solidFill>
-                  <a:srgbClr val="660033"/>
-                </a:solidFill>
-                <a:effectLst/>
-                <a:latin typeface="+mn-lt"/>
-              </a:rPr>
-              <a:t>1 / 4 </a:t>
-            </a:r>
-            <a:r>
-              <a:rPr lang="en-US" sz="4400" b="1" dirty="0">
-                <a:solidFill>
-                  <a:srgbClr val="660033"/>
-                </a:solidFill>
-                <a:effectLst/>
-                <a:latin typeface="+mn-lt"/>
-              </a:rPr>
-              <a:t>)</a:t>
+              <a:t>( 1 / 4 )</a:t>
             </a:r>
             <a:endParaRPr lang="vi-VN" sz="4400" b="1" dirty="0">
               <a:solidFill>
@@ -5012,13 +4830,6 @@
   <p:clrMapOvr>
     <a:masterClrMapping/>
   </p:clrMapOvr>
-  <p:timing>
-    <p:tnLst>
-      <p:par>
-        <p:cTn id="1" dur="indefinite" restart="never" nodeType="tmRoot"/>
-      </p:par>
-    </p:tnLst>
-  </p:timing>
 </p:sld>
 </file>
 
@@ -5141,13 +4952,6 @@
   <p:clrMapOvr>
     <a:masterClrMapping/>
   </p:clrMapOvr>
-  <p:timing>
-    <p:tnLst>
-      <p:par>
-        <p:cTn id="1" dur="indefinite" restart="never" nodeType="tmRoot"/>
-      </p:par>
-    </p:tnLst>
-  </p:timing>
 </p:sld>
 </file>
 
@@ -5238,13 +5042,6 @@
   <p:clrMapOvr>
     <a:masterClrMapping/>
   </p:clrMapOvr>
-  <p:timing>
-    <p:tnLst>
-      <p:par>
-        <p:cTn id="1" dur="indefinite" restart="never" nodeType="tmRoot"/>
-      </p:par>
-    </p:tnLst>
-  </p:timing>
 </p:sld>
 </file>
 
@@ -5328,13 +5125,6 @@
   <p:clrMapOvr>
     <a:masterClrMapping/>
   </p:clrMapOvr>
-  <p:timing>
-    <p:tnLst>
-      <p:par>
-        <p:cTn id="1" dur="indefinite" restart="never" nodeType="tmRoot"/>
-      </p:par>
-    </p:tnLst>
-  </p:timing>
 </p:sld>
 </file>
 
@@ -5444,23 +5234,7 @@
                   <a:srgbClr val="660033"/>
                 </a:solidFill>
               </a:rPr>
-              <a:t>( </a:t>
-            </a:r>
-            <a:r>
-              <a:rPr lang="en-US" sz="4400" b="1" dirty="0" smtClean="0">
-                <a:solidFill>
-                  <a:srgbClr val="660033"/>
-                </a:solidFill>
-              </a:rPr>
-              <a:t>2 </a:t>
-            </a:r>
-            <a:r>
-              <a:rPr lang="en-US" sz="4400" b="1" dirty="0">
-                <a:solidFill>
-                  <a:srgbClr val="660033"/>
-                </a:solidFill>
-              </a:rPr>
-              <a:t>/ 4 )</a:t>
+              <a:t>( 2 / 4 )</a:t>
             </a:r>
             <a:endParaRPr lang="vi-VN" sz="4400" b="1" dirty="0">
               <a:solidFill>
@@ -5480,13 +5254,6 @@
   <p:clrMapOvr>
     <a:masterClrMapping/>
   </p:clrMapOvr>
-  <p:timing>
-    <p:tnLst>
-      <p:par>
-        <p:cTn id="1" dur="indefinite" restart="never" nodeType="tmRoot"/>
-      </p:par>
-    </p:tnLst>
-  </p:timing>
 </p:sld>
 </file>
 
@@ -5609,13 +5376,6 @@
   <p:clrMapOvr>
     <a:masterClrMapping/>
   </p:clrMapOvr>
-  <p:timing>
-    <p:tnLst>
-      <p:par>
-        <p:cTn id="1" dur="indefinite" restart="never" nodeType="tmRoot"/>
-      </p:par>
-    </p:tnLst>
-  </p:timing>
 </p:sld>
 </file>
 
@@ -5706,13 +5466,6 @@
   <p:clrMapOvr>
     <a:masterClrMapping/>
   </p:clrMapOvr>
-  <p:timing>
-    <p:tnLst>
-      <p:par>
-        <p:cTn id="1" dur="indefinite" restart="never" nodeType="tmRoot"/>
-      </p:par>
-    </p:tnLst>
-  </p:timing>
 </p:sld>
 </file>
 
@@ -5796,13 +5549,6 @@
   <p:clrMapOvr>
     <a:masterClrMapping/>
   </p:clrMapOvr>
-  <p:timing>
-    <p:tnLst>
-      <p:par>
-        <p:cTn id="1" dur="indefinite" restart="never" nodeType="tmRoot"/>
-      </p:par>
-    </p:tnLst>
-  </p:timing>
 </p:sld>
 </file>
 
